--- a/Supporting_Measures/Supporting Measures.pptx
+++ b/Supporting_Measures/Supporting Measures.pptx
@@ -125,6 +125,118 @@
 
 <file path=ppt/changesInfos/changesInfo1.xml><?xml version="1.0" encoding="utf-8"?>
 <pc:chgInfo xmlns:a="http://schemas.openxmlformats.org/drawingml/2006/main" xmlns:r="http://schemas.openxmlformats.org/officeDocument/2006/relationships" xmlns:ac="http://schemas.microsoft.com/office/drawing/2013/main/command" xmlns:pc="http://schemas.microsoft.com/office/powerpoint/2013/main/command">
+  <pc:docChgLst>
+    <pc:chgData name="Chad Furl" userId="e1f063c0-f891-481e-b162-0b825299f031" providerId="ADAL" clId="{6ADDB542-7708-4E33-BA5D-95E7728F0CE2}"/>
+    <pc:docChg chg="undo custSel modSld">
+      <pc:chgData name="Chad Furl" userId="e1f063c0-f891-481e-b162-0b825299f031" providerId="ADAL" clId="{6ADDB542-7708-4E33-BA5D-95E7728F0CE2}" dt="2026-08-26T15:11:50.656" v="366" actId="20577"/>
+      <pc:docMkLst>
+        <pc:docMk/>
+      </pc:docMkLst>
+      <pc:sldChg chg="addSp delSp modSp mod">
+        <pc:chgData name="Chad Furl" userId="e1f063c0-f891-481e-b162-0b825299f031" providerId="ADAL" clId="{6ADDB542-7708-4E33-BA5D-95E7728F0CE2}" dt="2026-08-26T15:11:50.656" v="366" actId="20577"/>
+        <pc:sldMkLst>
+          <pc:docMk/>
+          <pc:sldMk cId="0" sldId="266"/>
+        </pc:sldMkLst>
+        <pc:spChg chg="mod">
+          <ac:chgData name="Chad Furl" userId="e1f063c0-f891-481e-b162-0b825299f031" providerId="ADAL" clId="{6ADDB542-7708-4E33-BA5D-95E7728F0CE2}" dt="2026-08-26T15:03:46.940" v="90" actId="20577"/>
+          <ac:spMkLst>
+            <pc:docMk/>
+            <pc:sldMk cId="0" sldId="266"/>
+            <ac:spMk id="3" creationId="{00000000-0000-0000-0000-000000000000}"/>
+          </ac:spMkLst>
+        </pc:spChg>
+        <pc:spChg chg="del mod">
+          <ac:chgData name="Chad Furl" userId="e1f063c0-f891-481e-b162-0b825299f031" providerId="ADAL" clId="{6ADDB542-7708-4E33-BA5D-95E7728F0CE2}" dt="2026-08-26T15:03:50.846" v="91" actId="478"/>
+          <ac:spMkLst>
+            <pc:docMk/>
+            <pc:sldMk cId="0" sldId="266"/>
+            <ac:spMk id="4" creationId="{00000000-0000-0000-0000-000000000000}"/>
+          </ac:spMkLst>
+        </pc:spChg>
+        <pc:spChg chg="add del mod">
+          <ac:chgData name="Chad Furl" userId="e1f063c0-f891-481e-b162-0b825299f031" providerId="ADAL" clId="{6ADDB542-7708-4E33-BA5D-95E7728F0CE2}" dt="2026-08-26T15:04:09.176" v="103" actId="20577"/>
+          <ac:spMkLst>
+            <pc:docMk/>
+            <pc:sldMk cId="0" sldId="266"/>
+            <ac:spMk id="6" creationId="{00000000-0000-0000-0000-000000000000}"/>
+          </ac:spMkLst>
+        </pc:spChg>
+        <pc:spChg chg="mod">
+          <ac:chgData name="Chad Furl" userId="e1f063c0-f891-481e-b162-0b825299f031" providerId="ADAL" clId="{6ADDB542-7708-4E33-BA5D-95E7728F0CE2}" dt="2026-08-26T15:06:15.889" v="165" actId="20577"/>
+          <ac:spMkLst>
+            <pc:docMk/>
+            <pc:sldMk cId="0" sldId="266"/>
+            <ac:spMk id="7" creationId="{00000000-0000-0000-0000-000000000000}"/>
+          </ac:spMkLst>
+        </pc:spChg>
+        <pc:spChg chg="mod">
+          <ac:chgData name="Chad Furl" userId="e1f063c0-f891-481e-b162-0b825299f031" providerId="ADAL" clId="{6ADDB542-7708-4E33-BA5D-95E7728F0CE2}" dt="2026-08-26T15:11:13.296" v="343" actId="5793"/>
+          <ac:spMkLst>
+            <pc:docMk/>
+            <pc:sldMk cId="0" sldId="266"/>
+            <ac:spMk id="8" creationId="{00000000-0000-0000-0000-000000000000}"/>
+          </ac:spMkLst>
+        </pc:spChg>
+        <pc:spChg chg="mod">
+          <ac:chgData name="Chad Furl" userId="e1f063c0-f891-481e-b162-0b825299f031" providerId="ADAL" clId="{6ADDB542-7708-4E33-BA5D-95E7728F0CE2}" dt="2026-08-26T15:04:15.797" v="111" actId="20577"/>
+          <ac:spMkLst>
+            <pc:docMk/>
+            <pc:sldMk cId="0" sldId="266"/>
+            <ac:spMk id="10" creationId="{00000000-0000-0000-0000-000000000000}"/>
+          </ac:spMkLst>
+        </pc:spChg>
+        <pc:spChg chg="mod">
+          <ac:chgData name="Chad Furl" userId="e1f063c0-f891-481e-b162-0b825299f031" providerId="ADAL" clId="{6ADDB542-7708-4E33-BA5D-95E7728F0CE2}" dt="2026-08-26T15:07:05.888" v="181" actId="20577"/>
+          <ac:spMkLst>
+            <pc:docMk/>
+            <pc:sldMk cId="0" sldId="266"/>
+            <ac:spMk id="11" creationId="{00000000-0000-0000-0000-000000000000}"/>
+          </ac:spMkLst>
+        </pc:spChg>
+        <pc:spChg chg="mod">
+          <ac:chgData name="Chad Furl" userId="e1f063c0-f891-481e-b162-0b825299f031" providerId="ADAL" clId="{6ADDB542-7708-4E33-BA5D-95E7728F0CE2}" dt="2026-08-26T15:11:50.656" v="366" actId="20577"/>
+          <ac:spMkLst>
+            <pc:docMk/>
+            <pc:sldMk cId="0" sldId="266"/>
+            <ac:spMk id="12" creationId="{00000000-0000-0000-0000-000000000000}"/>
+          </ac:spMkLst>
+        </pc:spChg>
+        <pc:spChg chg="mod">
+          <ac:chgData name="Chad Furl" userId="e1f063c0-f891-481e-b162-0b825299f031" providerId="ADAL" clId="{6ADDB542-7708-4E33-BA5D-95E7728F0CE2}" dt="2026-08-26T15:04:26.901" v="120" actId="20577"/>
+          <ac:spMkLst>
+            <pc:docMk/>
+            <pc:sldMk cId="0" sldId="266"/>
+            <ac:spMk id="14" creationId="{00000000-0000-0000-0000-000000000000}"/>
+          </ac:spMkLst>
+        </pc:spChg>
+        <pc:spChg chg="mod">
+          <ac:chgData name="Chad Furl" userId="e1f063c0-f891-481e-b162-0b825299f031" providerId="ADAL" clId="{6ADDB542-7708-4E33-BA5D-95E7728F0CE2}" dt="2026-08-26T15:07:23.586" v="222" actId="20577"/>
+          <ac:spMkLst>
+            <pc:docMk/>
+            <pc:sldMk cId="0" sldId="266"/>
+            <ac:spMk id="15" creationId="{00000000-0000-0000-0000-000000000000}"/>
+          </ac:spMkLst>
+        </pc:spChg>
+        <pc:spChg chg="mod">
+          <ac:chgData name="Chad Furl" userId="e1f063c0-f891-481e-b162-0b825299f031" providerId="ADAL" clId="{6ADDB542-7708-4E33-BA5D-95E7728F0CE2}" dt="2026-08-26T15:11:08.802" v="341" actId="5793"/>
+          <ac:spMkLst>
+            <pc:docMk/>
+            <pc:sldMk cId="0" sldId="266"/>
+            <ac:spMk id="16" creationId="{00000000-0000-0000-0000-000000000000}"/>
+          </ac:spMkLst>
+        </pc:spChg>
+        <pc:spChg chg="del">
+          <ac:chgData name="Chad Furl" userId="e1f063c0-f891-481e-b162-0b825299f031" providerId="ADAL" clId="{6ADDB542-7708-4E33-BA5D-95E7728F0CE2}" dt="2026-08-26T15:11:19.276" v="344" actId="478"/>
+          <ac:spMkLst>
+            <pc:docMk/>
+            <pc:sldMk cId="0" sldId="266"/>
+            <ac:spMk id="18" creationId="{00000000-0000-0000-0000-000000000000}"/>
+          </ac:spMkLst>
+        </pc:spChg>
+      </pc:sldChg>
+    </pc:docChg>
+  </pc:docChgLst>
   <pc:docChgLst>
     <pc:chgData name="Chad Furl" userId="e1f063c0-f891-481e-b162-0b825299f031" providerId="ADAL" clId="{3E978C21-B3D0-4285-96BE-5AD851B5E1C0}"/>
     <pc:docChg chg="modSld sldOrd">
@@ -4315,50 +4427,9 @@
                 <a:ea typeface="Aptos Display" pitchFamily="34" charset="-122"/>
                 <a:cs typeface="Aptos Display" pitchFamily="34" charset="-120"/>
               </a:rPr>
-              <a:t>Looking forward: protect the next implementation cycle</a:t>
+              <a:t>Supporting Measures</a:t>
             </a:r>
             <a:endParaRPr lang="en-US" sz="3000" dirty="0"/>
-          </a:p>
-        </p:txBody>
-      </p:sp>
-      <p:sp>
-        <p:nvSpPr>
-          <p:cNvPr id="4" name="Text 2"/>
-          <p:cNvSpPr txBox="1"/>
-          <p:nvPr/>
-        </p:nvSpPr>
-        <p:spPr>
-          <a:xfrm>
-            <a:off x="685800" y="1426464"/>
-            <a:ext cx="10424160" cy="438912"/>
-          </a:xfrm>
-          <a:prstGeom prst="rect">
-            <a:avLst/>
-          </a:prstGeom>
-          <a:noFill/>
-          <a:ln/>
-        </p:spPr>
-        <p:txBody>
-          <a:bodyPr wrap="square" lIns="0" tIns="0" rIns="0" bIns="0" rtlCol="0" anchor="t">
-            <a:normAutofit/>
-          </a:bodyPr>
-          <a:lstStyle/>
-          <a:p>
-            <a:pPr marL="0" indent="0" algn="l">
-              <a:buNone/>
-            </a:pPr>
-            <a:r>
-              <a:rPr lang="en-US" sz="1450" dirty="0">
-                <a:solidFill>
-                  <a:srgbClr val="63747A"/>
-                </a:solidFill>
-                <a:latin typeface="Aptos" pitchFamily="34" charset="0"/>
-                <a:ea typeface="Aptos" pitchFamily="34" charset="-122"/>
-                <a:cs typeface="Aptos" pitchFamily="34" charset="-120"/>
-              </a:rPr>
-              <a:t>Organize the close around near-term commitments—not a generic summary.</a:t>
-            </a:r>
-            <a:endParaRPr lang="en-US" sz="1450" dirty="0"/>
           </a:p>
         </p:txBody>
       </p:sp>
@@ -4431,7 +4502,7 @@
                 <a:ea typeface="Aptos" pitchFamily="34" charset="-122"/>
                 <a:cs typeface="Aptos" pitchFamily="34" charset="-120"/>
               </a:rPr>
-              <a:t>NOW</a:t>
+              <a:t>MONITORING</a:t>
             </a:r>
             <a:endParaRPr lang="en-US" sz="950" dirty="0"/>
           </a:p>
@@ -4469,10 +4540,8 @@
                   <a:srgbClr val="0B3C5D"/>
                 </a:solidFill>
                 <a:latin typeface="Aptos Display" pitchFamily="34" charset="0"/>
-                <a:ea typeface="Aptos Display" pitchFamily="34" charset="-122"/>
-                <a:cs typeface="Aptos Display" pitchFamily="34" charset="-120"/>
-              </a:rPr>
-              <a:t>Before the next operational milestone</a:t>
+              </a:rPr>
+              <a:t>Biological and Water Quality Monitoring</a:t>
             </a:r>
             <a:endParaRPr lang="en-US" sz="2100" dirty="0"/>
           </a:p>
@@ -4501,57 +4570,9 @@
           </a:bodyPr>
           <a:lstStyle/>
           <a:p>
-            <a:pPr marL="177800" indent="-177800">
+            <a:pPr>
               <a:buSzPct val="100000"/>
-              <a:buChar char="•"/>
-            </a:pPr>
-            <a:r>
-              <a:rPr lang="en-US" sz="1300" dirty="0">
-                <a:solidFill>
-                  <a:srgbClr val="24343B"/>
-                </a:solidFill>
-                <a:latin typeface="Aptos" pitchFamily="34" charset="0"/>
-                <a:ea typeface="Aptos" pitchFamily="34" charset="-122"/>
-                <a:cs typeface="Aptos" pitchFamily="34" charset="-120"/>
-              </a:rPr>
-              <a:t>Confirm current status</a:t>
-            </a:r>
-            <a:endParaRPr lang="en-US" sz="1300" dirty="0"/>
-          </a:p>
-          <a:p>
-            <a:pPr marL="177800" indent="-177800">
-              <a:buSzPct val="100000"/>
-              <a:buChar char="•"/>
-            </a:pPr>
-            <a:r>
-              <a:rPr lang="en-US" sz="1300" dirty="0">
-                <a:solidFill>
-                  <a:srgbClr val="24343B"/>
-                </a:solidFill>
-                <a:latin typeface="Aptos" pitchFamily="34" charset="0"/>
-                <a:ea typeface="Aptos" pitchFamily="34" charset="-122"/>
-                <a:cs typeface="Aptos" pitchFamily="34" charset="-120"/>
-              </a:rPr>
-              <a:t>Close immediate data gaps</a:t>
-            </a:r>
-            <a:endParaRPr lang="en-US" sz="1300" dirty="0"/>
-          </a:p>
-          <a:p>
-            <a:pPr marL="177800" indent="-177800">
-              <a:buSzPct val="100000"/>
-              <a:buChar char="•"/>
-            </a:pPr>
-            <a:r>
-              <a:rPr lang="en-US" sz="1300" dirty="0">
-                <a:solidFill>
-                  <a:srgbClr val="24343B"/>
-                </a:solidFill>
-                <a:latin typeface="Aptos" pitchFamily="34" charset="0"/>
-                <a:ea typeface="Aptos" pitchFamily="34" charset="-122"/>
-                <a:cs typeface="Aptos" pitchFamily="34" charset="-120"/>
-              </a:rPr>
-              <a:t>Document decisions</a:t>
-            </a:r>
+            </a:pPr>
             <a:endParaRPr lang="en-US" sz="1300" dirty="0"/>
           </a:p>
         </p:txBody>
@@ -4625,7 +4646,7 @@
                 <a:ea typeface="Aptos" pitchFamily="34" charset="-122"/>
                 <a:cs typeface="Aptos" pitchFamily="34" charset="-120"/>
               </a:rPr>
-              <a:t>NEXT CYCLE</a:t>
+              <a:t>RESEARCH</a:t>
             </a:r>
             <a:endParaRPr lang="en-US" sz="950" dirty="0"/>
           </a:p>
@@ -4666,7 +4687,7 @@
                 <a:ea typeface="Aptos Display" pitchFamily="34" charset="-122"/>
                 <a:cs typeface="Aptos Display" pitchFamily="34" charset="-120"/>
               </a:rPr>
-              <a:t>Before the next committee meeting</a:t>
+              <a:t>Applied Research</a:t>
             </a:r>
             <a:endParaRPr lang="en-US" sz="2100" dirty="0"/>
           </a:p>
@@ -4680,8 +4701,8 @@
         </p:nvSpPr>
         <p:spPr>
           <a:xfrm>
-            <a:off x="4672584" y="3447288"/>
-            <a:ext cx="2670048" cy="1481328"/>
+            <a:off x="4672584" y="3180523"/>
+            <a:ext cx="2670048" cy="1971922"/>
           </a:xfrm>
           <a:prstGeom prst="rect">
             <a:avLst/>
@@ -4700,7 +4721,7 @@
               <a:buChar char="•"/>
             </a:pPr>
             <a:r>
-              <a:rPr lang="en-US" sz="1300" dirty="0">
+              <a:rPr lang="en-US" sz="1600" dirty="0">
                 <a:solidFill>
                   <a:srgbClr val="24343B"/>
                 </a:solidFill>
@@ -4708,9 +4729,9 @@
                 <a:ea typeface="Aptos" pitchFamily="34" charset="-122"/>
                 <a:cs typeface="Aptos" pitchFamily="34" charset="-120"/>
               </a:rPr>
-              <a:t>Complete targeted analyses</a:t>
-            </a:r>
-            <a:endParaRPr lang="en-US" sz="1300" dirty="0"/>
+              <a:t>San Marcos salamander monitoring protocol</a:t>
+            </a:r>
+            <a:endParaRPr lang="en-US" sz="1600" dirty="0"/>
           </a:p>
           <a:p>
             <a:pPr marL="177800" indent="-177800">
@@ -4718,7 +4739,7 @@
               <a:buChar char="•"/>
             </a:pPr>
             <a:r>
-              <a:rPr lang="en-US" sz="1300" dirty="0">
+              <a:rPr lang="en-US" sz="1600" dirty="0">
                 <a:solidFill>
                   <a:srgbClr val="24343B"/>
                 </a:solidFill>
@@ -4726,9 +4747,9 @@
                 <a:ea typeface="Aptos" pitchFamily="34" charset="-122"/>
                 <a:cs typeface="Aptos" pitchFamily="34" charset="-120"/>
               </a:rPr>
-              <a:t>Refine presentation of triggers</a:t>
-            </a:r>
-            <a:endParaRPr lang="en-US" sz="1300" dirty="0"/>
+              <a:t>CSRB genetics across droughts</a:t>
+            </a:r>
+            <a:endParaRPr lang="en-US" sz="1600" dirty="0"/>
           </a:p>
           <a:p>
             <a:pPr marL="177800" indent="-177800">
@@ -4736,7 +4757,7 @@
               <a:buChar char="•"/>
             </a:pPr>
             <a:r>
-              <a:rPr lang="en-US" sz="1300" dirty="0">
+              <a:rPr lang="en-US" sz="1600" dirty="0">
                 <a:solidFill>
                   <a:srgbClr val="24343B"/>
                 </a:solidFill>
@@ -4744,9 +4765,24 @@
                 <a:ea typeface="Aptos" pitchFamily="34" charset="-122"/>
                 <a:cs typeface="Aptos" pitchFamily="34" charset="-120"/>
               </a:rPr>
-              <a:t>Track agreed actions</a:t>
-            </a:r>
-            <a:endParaRPr lang="en-US" sz="1300" dirty="0"/>
+              <a:t>Comal Springs dryopid monitoring protocol</a:t>
+            </a:r>
+          </a:p>
+          <a:p>
+            <a:pPr marL="177800" indent="-177800">
+              <a:buSzPct val="100000"/>
+              <a:buChar char="•"/>
+            </a:pPr>
+            <a:r>
+              <a:rPr lang="en-US" sz="1600" dirty="0">
+                <a:solidFill>
+                  <a:srgbClr val="24343B"/>
+                </a:solidFill>
+                <a:latin typeface="Aptos" pitchFamily="34" charset="0"/>
+              </a:rPr>
+              <a:t>Data Management</a:t>
+            </a:r>
+            <a:endParaRPr lang="en-US" sz="1600" dirty="0"/>
           </a:p>
         </p:txBody>
       </p:sp>
@@ -4819,7 +4855,7 @@
                 <a:ea typeface="Aptos" pitchFamily="34" charset="-122"/>
                 <a:cs typeface="Aptos" pitchFamily="34" charset="-120"/>
               </a:rPr>
-              <a:t>LONGER TERM</a:t>
+              <a:t>REFUGIA</a:t>
             </a:r>
             <a:endParaRPr lang="en-US" sz="950" dirty="0"/>
           </a:p>
@@ -4860,7 +4896,7 @@
                 <a:ea typeface="Aptos Display" pitchFamily="34" charset="-122"/>
                 <a:cs typeface="Aptos Display" pitchFamily="34" charset="-120"/>
               </a:rPr>
-              <a:t>Program learning agenda</a:t>
+              <a:t>Edwards Aquifer Refugia Program</a:t>
             </a:r>
             <a:endParaRPr lang="en-US" sz="2100" dirty="0"/>
           </a:p>
@@ -4889,57 +4925,9 @@
           </a:bodyPr>
           <a:lstStyle/>
           <a:p>
-            <a:pPr marL="177800" indent="-177800">
+            <a:pPr>
               <a:buSzPct val="100000"/>
-              <a:buChar char="•"/>
-            </a:pPr>
-            <a:r>
-              <a:rPr lang="en-US" sz="1300" dirty="0">
-                <a:solidFill>
-                  <a:srgbClr val="24343B"/>
-                </a:solidFill>
-                <a:latin typeface="Aptos" pitchFamily="34" charset="0"/>
-                <a:ea typeface="Aptos" pitchFamily="34" charset="-122"/>
-                <a:cs typeface="Aptos" pitchFamily="34" charset="-120"/>
-              </a:rPr>
-              <a:t>Improve integration across measures</a:t>
-            </a:r>
-            <a:endParaRPr lang="en-US" sz="1300" dirty="0"/>
-          </a:p>
-          <a:p>
-            <a:pPr marL="177800" indent="-177800">
-              <a:buSzPct val="100000"/>
-              <a:buChar char="•"/>
-            </a:pPr>
-            <a:r>
-              <a:rPr lang="en-US" sz="1300" dirty="0">
-                <a:solidFill>
-                  <a:srgbClr val="24343B"/>
-                </a:solidFill>
-                <a:latin typeface="Aptos" pitchFamily="34" charset="0"/>
-                <a:ea typeface="Aptos" pitchFamily="34" charset="-122"/>
-                <a:cs typeface="Aptos" pitchFamily="34" charset="-120"/>
-              </a:rPr>
-              <a:t>Evaluate performance over time</a:t>
-            </a:r>
-            <a:endParaRPr lang="en-US" sz="1300" dirty="0"/>
-          </a:p>
-          <a:p>
-            <a:pPr marL="177800" indent="-177800">
-              <a:buSzPct val="100000"/>
-              <a:buChar char="•"/>
-            </a:pPr>
-            <a:r>
-              <a:rPr lang="en-US" sz="1300" dirty="0">
-                <a:solidFill>
-                  <a:srgbClr val="24343B"/>
-                </a:solidFill>
-                <a:latin typeface="Aptos" pitchFamily="34" charset="0"/>
-                <a:ea typeface="Aptos" pitchFamily="34" charset="-122"/>
-                <a:cs typeface="Aptos" pitchFamily="34" charset="-120"/>
-              </a:rPr>
-              <a:t>Identify adaptive changes</a:t>
-            </a:r>
+            </a:pPr>
             <a:endParaRPr lang="en-US" sz="1300" dirty="0"/>
           </a:p>
         </p:txBody>
@@ -4975,47 +4963,6 @@
           <a:lstStyle/>
           <a:p>
             <a:endParaRPr lang="en-US"/>
-          </a:p>
-        </p:txBody>
-      </p:sp>
-      <p:sp>
-        <p:nvSpPr>
-          <p:cNvPr id="18" name="Text 16"/>
-          <p:cNvSpPr txBox="1"/>
-          <p:nvPr/>
-        </p:nvSpPr>
-        <p:spPr>
-          <a:xfrm>
-            <a:off x="941832" y="5797296"/>
-            <a:ext cx="10168128" cy="210312"/>
-          </a:xfrm>
-          <a:prstGeom prst="rect">
-            <a:avLst/>
-          </a:prstGeom>
-          <a:noFill/>
-          <a:ln/>
-        </p:spPr>
-        <p:txBody>
-          <a:bodyPr wrap="square" lIns="0" tIns="0" rIns="0" bIns="0" rtlCol="0" anchor="ctr">
-            <a:normAutofit/>
-          </a:bodyPr>
-          <a:lstStyle/>
-          <a:p>
-            <a:pPr marL="0" indent="0" algn="l">
-              <a:buNone/>
-            </a:pPr>
-            <a:r>
-              <a:rPr lang="en-US" sz="1120" b="1" dirty="0">
-                <a:solidFill>
-                  <a:srgbClr val="FFFFFF"/>
-                </a:solidFill>
-                <a:latin typeface="Aptos" pitchFamily="34" charset="0"/>
-                <a:ea typeface="Aptos" pitchFamily="34" charset="-122"/>
-                <a:cs typeface="Aptos" pitchFamily="34" charset="-120"/>
-              </a:rPr>
-              <a:t>CLOSE WITH OWNERSHIP  ·  Who will do what, by when, and what evidence will show completion?</a:t>
-            </a:r>
-            <a:endParaRPr lang="en-US" sz="1120" dirty="0"/>
           </a:p>
         </p:txBody>
       </p:sp>

--- a/Supporting_Measures/Supporting Measures.pptx
+++ b/Supporting_Measures/Supporting Measures.pptx
@@ -128,10 +128,33 @@
   <pc:docChgLst>
     <pc:chgData name="Chad Furl" userId="e1f063c0-f891-481e-b162-0b825299f031" providerId="ADAL" clId="{6ADDB542-7708-4E33-BA5D-95E7728F0CE2}"/>
     <pc:docChg chg="undo custSel modSld">
-      <pc:chgData name="Chad Furl" userId="e1f063c0-f891-481e-b162-0b825299f031" providerId="ADAL" clId="{6ADDB542-7708-4E33-BA5D-95E7728F0CE2}" dt="2026-08-26T15:11:50.656" v="366" actId="20577"/>
+      <pc:chgData name="Chad Furl" userId="e1f063c0-f891-481e-b162-0b825299f031" providerId="ADAL" clId="{6ADDB542-7708-4E33-BA5D-95E7728F0CE2}" dt="2026-08-27T16:35:32.334" v="396" actId="478"/>
       <pc:docMkLst>
         <pc:docMk/>
       </pc:docMkLst>
+      <pc:sldChg chg="delSp modSp mod">
+        <pc:chgData name="Chad Furl" userId="e1f063c0-f891-481e-b162-0b825299f031" providerId="ADAL" clId="{6ADDB542-7708-4E33-BA5D-95E7728F0CE2}" dt="2026-08-27T16:35:32.334" v="396" actId="478"/>
+        <pc:sldMkLst>
+          <pc:docMk/>
+          <pc:sldMk cId="0" sldId="256"/>
+        </pc:sldMkLst>
+        <pc:spChg chg="mod">
+          <ac:chgData name="Chad Furl" userId="e1f063c0-f891-481e-b162-0b825299f031" providerId="ADAL" clId="{6ADDB542-7708-4E33-BA5D-95E7728F0CE2}" dt="2026-08-27T16:35:11.087" v="395" actId="20577"/>
+          <ac:spMkLst>
+            <pc:docMk/>
+            <pc:sldMk cId="0" sldId="256"/>
+            <ac:spMk id="6" creationId="{00000000-0000-0000-0000-000000000000}"/>
+          </ac:spMkLst>
+        </pc:spChg>
+        <pc:spChg chg="del">
+          <ac:chgData name="Chad Furl" userId="e1f063c0-f891-481e-b162-0b825299f031" providerId="ADAL" clId="{6ADDB542-7708-4E33-BA5D-95E7728F0CE2}" dt="2026-08-27T16:35:32.334" v="396" actId="478"/>
+          <ac:spMkLst>
+            <pc:docMk/>
+            <pc:sldMk cId="0" sldId="256"/>
+            <ac:spMk id="7" creationId="{00000000-0000-0000-0000-000000000000}"/>
+          </ac:spMkLst>
+        </pc:spChg>
+      </pc:sldChg>
       <pc:sldChg chg="addSp delSp modSp mod">
         <pc:chgData name="Chad Furl" userId="e1f063c0-f891-481e-b162-0b825299f031" providerId="ADAL" clId="{6ADDB542-7708-4E33-BA5D-95E7728F0CE2}" dt="2026-08-26T15:11:50.656" v="366" actId="20577"/>
         <pc:sldMkLst>
@@ -1893,67 +1916,9 @@
                 <a:ea typeface="Aptos Display" pitchFamily="34" charset="-122"/>
                 <a:cs typeface="Aptos Display" pitchFamily="34" charset="-120"/>
               </a:rPr>
-              <a:t>Springflow Protection</a:t>
+              <a:t>Supporting Measures</a:t>
             </a:r>
             <a:endParaRPr lang="en-US" sz="4300" dirty="0"/>
-          </a:p>
-          <a:p>
-            <a:pPr marL="0" indent="0" algn="l">
-              <a:buNone/>
-            </a:pPr>
-            <a:r>
-              <a:rPr lang="en-US" sz="4300" b="1" dirty="0">
-                <a:solidFill>
-                  <a:srgbClr val="FFFFFF"/>
-                </a:solidFill>
-                <a:latin typeface="Aptos Display" pitchFamily="34" charset="0"/>
-                <a:ea typeface="Aptos Display" pitchFamily="34" charset="-122"/>
-                <a:cs typeface="Aptos Display" pitchFamily="34" charset="-120"/>
-              </a:rPr>
-              <a:t>Programs</a:t>
-            </a:r>
-            <a:endParaRPr lang="en-US" sz="4300" dirty="0"/>
-          </a:p>
-        </p:txBody>
-      </p:sp>
-      <p:sp>
-        <p:nvSpPr>
-          <p:cNvPr id="7" name="Text 3"/>
-          <p:cNvSpPr txBox="1"/>
-          <p:nvPr/>
-        </p:nvSpPr>
-        <p:spPr>
-          <a:xfrm>
-            <a:off x="777240" y="3127248"/>
-            <a:ext cx="6217920" cy="365760"/>
-          </a:xfrm>
-          <a:prstGeom prst="rect">
-            <a:avLst/>
-          </a:prstGeom>
-          <a:noFill/>
-          <a:ln/>
-        </p:spPr>
-        <p:txBody>
-          <a:bodyPr wrap="square" lIns="0" tIns="0" rIns="0" bIns="0" rtlCol="0" anchor="t">
-            <a:normAutofit/>
-          </a:bodyPr>
-          <a:lstStyle/>
-          <a:p>
-            <a:pPr marL="0" indent="0" algn="l">
-              <a:buNone/>
-            </a:pPr>
-            <a:r>
-              <a:rPr lang="en-US" sz="1700" dirty="0">
-                <a:solidFill>
-                  <a:srgbClr val="D8E6EA"/>
-                </a:solidFill>
-                <a:latin typeface="Aptos" pitchFamily="34" charset="0"/>
-                <a:ea typeface="Aptos" pitchFamily="34" charset="-122"/>
-                <a:cs typeface="Aptos" pitchFamily="34" charset="-120"/>
-              </a:rPr>
-              <a:t>Scientific implementation briefing template</a:t>
-            </a:r>
-            <a:endParaRPr lang="en-US" sz="1700" dirty="0"/>
           </a:p>
         </p:txBody>
       </p:sp>
